--- a/template-folder/example-topic/template-slides.pptx
+++ b/template-folder/example-topic/template-slides.pptx
@@ -7372,7 +7372,7 @@
             </a:pPr>
             <a:r>
               <a:rPr/>
-              <a:t>13/10/2026</a:t>
+              <a:t>16/10/2026</a:t>
             </a:r>
           </a:p>
         </p:txBody>

--- a/template-folder/example-topic/template-slides.pptx
+++ b/template-folder/example-topic/template-slides.pptx
@@ -7372,7 +7372,7 @@
             </a:pPr>
             <a:r>
               <a:rPr/>
-              <a:t>16/10/2026</a:t>
+              <a:t>19/10/2026</a:t>
             </a:r>
           </a:p>
         </p:txBody>

--- a/template-folder/example-topic/template-slides.pptx
+++ b/template-folder/example-topic/template-slides.pptx
@@ -7372,7 +7372,7 @@
             </a:pPr>
             <a:r>
               <a:rPr/>
-              <a:t>19/10/2026</a:t>
+              <a:t>26/10/2026</a:t>
             </a:r>
           </a:p>
         </p:txBody>
